--- a/reports/BRANCH_KUPANG_PERFORMANCE_SUMMARY_20260831_INARA.pptx
+++ b/reports/BRANCH_KUPANG_PERFORMANCE_SUMMARY_20260831_INARA.pptx
@@ -12493,7 +12493,7 @@
                 </a:solidFill>
                 <a:latin typeface="Arial"/>
               </a:rPr>
-              <a:t>86</a:t>
+              <a:t>89</a:t>
             </a:r>
           </a:p>
         </p:txBody>
@@ -12524,11 +12524,11 @@
             <a:r>
               <a:rPr sz="1200" b="1" i="0">
                 <a:solidFill>
-                  <a:srgbClr val="137D3F"/>
+                  <a:srgbClr val="687386"/>
                 </a:solidFill>
                 <a:latin typeface="Arial"/>
               </a:rPr>
-              <a:t>+2,4%</a:t>
+              <a:t>N/A</a:t>
             </a:r>
           </a:p>
         </p:txBody>
@@ -12563,7 +12563,7 @@
                 </a:solidFill>
                 <a:latin typeface="Arial"/>
               </a:rPr>
-              <a:t>MTD-1: 84   Δ 2</a:t>
+              <a:t>MTD-1: 0   Δ 89</a:t>
             </a:r>
           </a:p>
         </p:txBody>
@@ -12680,7 +12680,7 @@
                 </a:solidFill>
                 <a:latin typeface="Arial"/>
               </a:rPr>
-              <a:t>3.408</a:t>
+              <a:t>3.831</a:t>
             </a:r>
           </a:p>
         </p:txBody>
@@ -12711,11 +12711,11 @@
             <a:r>
               <a:rPr sz="1200" b="1" i="0">
                 <a:solidFill>
-                  <a:srgbClr val="D73527"/>
+                  <a:srgbClr val="687386"/>
                 </a:solidFill>
                 <a:latin typeface="Arial"/>
               </a:rPr>
-              <a:t>-26,6%</a:t>
+              <a:t>N/A</a:t>
             </a:r>
           </a:p>
         </p:txBody>
@@ -12750,7 +12750,7 @@
                 </a:solidFill>
                 <a:latin typeface="Arial"/>
               </a:rPr>
-              <a:t>MTD-1: 4.640   Δ -1.232</a:t>
+              <a:t>MTD-1: 0   Δ 3.831</a:t>
             </a:r>
           </a:p>
         </p:txBody>
@@ -13886,7 +13886,7 @@
                           </a:solidFill>
                           <a:latin typeface="Arial"/>
                         </a:rPr>
-                        <a:t>69</a:t>
+                        <a:t>0</a:t>
                       </a:r>
                     </a:p>
                   </a:txBody>
@@ -13933,7 +13933,7 @@
                           </a:solidFill>
                           <a:latin typeface="Arial"/>
                         </a:rPr>
-                        <a:t>70</a:t>
+                        <a:t>73</a:t>
                       </a:r>
                     </a:p>
                   </a:txBody>
@@ -13976,17 +13976,17 @@
                       <a:r>
                         <a:rPr sz="1050" b="0">
                           <a:solidFill>
-                            <a:srgbClr val="137D3F"/>
-                          </a:solidFill>
-                          <a:latin typeface="Arial"/>
-                        </a:rPr>
-                        <a:t>+1,4%</a:t>
-                      </a:r>
-                    </a:p>
-                  </a:txBody>
-                  <a:tcPr marL="27432" marR="27432" marT="0" marB="0">
-                    <a:solidFill>
-                      <a:srgbClr val="E5F4EA"/>
+                            <a:srgbClr val="687386"/>
+                          </a:solidFill>
+                          <a:latin typeface="Arial"/>
+                        </a:rPr>
+                        <a:t>N/A</a:t>
+                      </a:r>
+                    </a:p>
+                  </a:txBody>
+                  <a:tcPr marL="27432" marR="27432" marT="0" marB="0">
+                    <a:solidFill>
+                      <a:srgbClr val="E9EDF2"/>
                     </a:solidFill>
                     <a:lnL w="9000" cap="flat" cmpd="sng" algn="ctr">
                       <a:solidFill>
@@ -14027,7 +14027,7 @@
                           </a:solidFill>
                           <a:latin typeface="Arial"/>
                         </a:rPr>
-                        <a:t>3.944</a:t>
+                        <a:t>0</a:t>
                       </a:r>
                     </a:p>
                   </a:txBody>
@@ -14074,7 +14074,7 @@
                           </a:solidFill>
                           <a:latin typeface="Arial"/>
                         </a:rPr>
-                        <a:t>2.854</a:t>
+                        <a:t>3.223</a:t>
                       </a:r>
                     </a:p>
                   </a:txBody>
@@ -14117,17 +14117,17 @@
                       <a:r>
                         <a:rPr sz="1050" b="0">
                           <a:solidFill>
-                            <a:srgbClr val="D73527"/>
-                          </a:solidFill>
-                          <a:latin typeface="Arial"/>
-                        </a:rPr>
-                        <a:t>-27,6%</a:t>
-                      </a:r>
-                    </a:p>
-                  </a:txBody>
-                  <a:tcPr marL="27432" marR="27432" marT="0" marB="0">
-                    <a:solidFill>
-                      <a:srgbClr val="FBE9E7"/>
+                            <a:srgbClr val="687386"/>
+                          </a:solidFill>
+                          <a:latin typeface="Arial"/>
+                        </a:rPr>
+                        <a:t>N/A</a:t>
+                      </a:r>
+                    </a:p>
+                  </a:txBody>
+                  <a:tcPr marL="27432" marR="27432" marT="0" marB="0">
+                    <a:solidFill>
+                      <a:srgbClr val="E9EDF2"/>
                     </a:solidFill>
                     <a:lnL w="9000" cap="flat" cmpd="sng" algn="ctr">
                       <a:solidFill>
@@ -14546,7 +14546,7 @@
                           </a:solidFill>
                           <a:latin typeface="Arial"/>
                         </a:rPr>
-                        <a:t>15</a:t>
+                        <a:t>0</a:t>
                       </a:r>
                     </a:p>
                   </a:txBody>
@@ -14636,17 +14636,17 @@
                       <a:r>
                         <a:rPr sz="1050" b="0">
                           <a:solidFill>
-                            <a:srgbClr val="137D3F"/>
-                          </a:solidFill>
-                          <a:latin typeface="Arial"/>
-                        </a:rPr>
-                        <a:t>+6,7%</a:t>
-                      </a:r>
-                    </a:p>
-                  </a:txBody>
-                  <a:tcPr marL="27432" marR="27432" marT="0" marB="0">
-                    <a:solidFill>
-                      <a:srgbClr val="E5F4EA"/>
+                            <a:srgbClr val="687386"/>
+                          </a:solidFill>
+                          <a:latin typeface="Arial"/>
+                        </a:rPr>
+                        <a:t>N/A</a:t>
+                      </a:r>
+                    </a:p>
+                  </a:txBody>
+                  <a:tcPr marL="27432" marR="27432" marT="0" marB="0">
+                    <a:solidFill>
+                      <a:srgbClr val="E9EDF2"/>
                     </a:solidFill>
                     <a:lnL w="9000" cap="flat" cmpd="sng" algn="ctr">
                       <a:solidFill>
@@ -14687,7 +14687,7 @@
                           </a:solidFill>
                           <a:latin typeface="Arial"/>
                         </a:rPr>
-                        <a:t>696</a:t>
+                        <a:t>0</a:t>
                       </a:r>
                     </a:p>
                   </a:txBody>
@@ -14734,7 +14734,7 @@
                           </a:solidFill>
                           <a:latin typeface="Arial"/>
                         </a:rPr>
-                        <a:t>554</a:t>
+                        <a:t>608</a:t>
                       </a:r>
                     </a:p>
                   </a:txBody>
@@ -14777,17 +14777,17 @@
                       <a:r>
                         <a:rPr sz="1050" b="0">
                           <a:solidFill>
-                            <a:srgbClr val="D73527"/>
-                          </a:solidFill>
-                          <a:latin typeface="Arial"/>
-                        </a:rPr>
-                        <a:t>-20,4%</a:t>
-                      </a:r>
-                    </a:p>
-                  </a:txBody>
-                  <a:tcPr marL="27432" marR="27432" marT="0" marB="0">
-                    <a:solidFill>
-                      <a:srgbClr val="FBE9E7"/>
+                            <a:srgbClr val="687386"/>
+                          </a:solidFill>
+                          <a:latin typeface="Arial"/>
+                        </a:rPr>
+                        <a:t>N/A</a:t>
+                      </a:r>
+                    </a:p>
+                  </a:txBody>
+                  <a:tcPr marL="27432" marR="27432" marT="0" marB="0">
+                    <a:solidFill>
+                      <a:srgbClr val="E9EDF2"/>
                     </a:solidFill>
                     <a:lnL w="9000" cap="flat" cmpd="sng" algn="ctr">
                       <a:solidFill>
@@ -22131,7 +22131,7 @@
                           </a:solidFill>
                           <a:latin typeface="Arial"/>
                         </a:rPr>
-                        <a:t>679</a:t>
+                        <a:t>698</a:t>
                       </a:r>
                     </a:p>
                   </a:txBody>
@@ -22178,7 +22178,7 @@
                           </a:solidFill>
                           <a:latin typeface="Arial"/>
                         </a:rPr>
-                        <a:t>1.575</a:t>
+                        <a:t>1.582</a:t>
                       </a:r>
                     </a:p>
                   </a:txBody>
@@ -22225,7 +22225,7 @@
                           </a:solidFill>
                           <a:latin typeface="Arial"/>
                         </a:rPr>
-                        <a:t>6.861</a:t>
+                        <a:t>6.841</a:t>
                       </a:r>
                     </a:p>
                   </a:txBody>
@@ -22272,7 +22272,7 @@
                           </a:solidFill>
                           <a:latin typeface="Arial"/>
                         </a:rPr>
-                        <a:t>459</a:t>
+                        <a:t>455</a:t>
                       </a:r>
                     </a:p>
                   </a:txBody>
@@ -22366,7 +22366,7 @@
                           </a:solidFill>
                           <a:latin typeface="Arial"/>
                         </a:rPr>
-                        <a:t>9.999</a:t>
+                        <a:t>10.001</a:t>
                       </a:r>
                     </a:p>
                   </a:txBody>
@@ -22415,7 +22415,7 @@
                           </a:solidFill>
                           <a:latin typeface="Arial"/>
                         </a:rPr>
-                        <a:t>6,8%</a:t>
+                        <a:t>7,0%</a:t>
                       </a:r>
                     </a:p>
                   </a:txBody>
@@ -22509,7 +22509,7 @@
                           </a:solidFill>
                           <a:latin typeface="Arial"/>
                         </a:rPr>
-                        <a:t>68,6%</a:t>
+                        <a:t>68,4%</a:t>
                       </a:r>
                     </a:p>
                   </a:txBody>
@@ -22556,7 +22556,7 @@
                           </a:solidFill>
                           <a:latin typeface="Arial"/>
                         </a:rPr>
-                        <a:t>4,6%</a:t>
+                        <a:t>4,5%</a:t>
                       </a:r>
                     </a:p>
                   </a:txBody>
@@ -22603,7 +22603,7 @@
                           </a:solidFill>
                           <a:latin typeface="Arial"/>
                         </a:rPr>
-                        <a:t>4,3%</a:t>
+                        <a:t>4,2%</a:t>
                       </a:r>
                     </a:p>
                   </a:txBody>
@@ -22871,7 +22871,7 @@
                 </a:solidFill>
                 <a:latin typeface="Arial"/>
               </a:rPr>
-              <a:t>ODP dikunjungi  93 (21,9%)</a:t>
+              <a:t>ODP dikunjungi  97 (22,8%)</a:t>
             </a:r>
           </a:p>
         </p:txBody>
@@ -22941,7 +22941,7 @@
                 </a:solidFill>
                 <a:latin typeface="Arial"/>
               </a:rPr>
-              <a:t>358</a:t>
+              <a:t>397</a:t>
             </a:r>
           </a:p>
         </p:txBody>
@@ -23093,7 +23093,7 @@
                 </a:solidFill>
                 <a:latin typeface="Arial"/>
               </a:rPr>
-              <a:t>ODP dikunjungi  109 (76,2%)</a:t>
+              <a:t>ODP dikunjungi  116 (81,1%)</a:t>
             </a:r>
           </a:p>
         </p:txBody>
@@ -23163,7 +23163,7 @@
                 </a:solidFill>
                 <a:latin typeface="Arial"/>
               </a:rPr>
-              <a:t>330</a:t>
+              <a:t>356</a:t>
             </a:r>
           </a:p>
         </p:txBody>

--- a/reports/BRANCH_KUPANG_PERFORMANCE_SUMMARY_20260831_INARA.pptx
+++ b/reports/BRANCH_KUPANG_PERFORMANCE_SUMMARY_20260831_INARA.pptx
@@ -12524,11 +12524,11 @@
             <a:r>
               <a:rPr sz="1200" b="1" i="0">
                 <a:solidFill>
-                  <a:srgbClr val="687386"/>
+                  <a:srgbClr val="137D3F"/>
                 </a:solidFill>
                 <a:latin typeface="Arial"/>
               </a:rPr>
-              <a:t>N/A</a:t>
+              <a:t>+1,1%</a:t>
             </a:r>
           </a:p>
         </p:txBody>
@@ -12563,7 +12563,7 @@
                 </a:solidFill>
                 <a:latin typeface="Arial"/>
               </a:rPr>
-              <a:t>MTD-1: 0   Δ 89</a:t>
+              <a:t>MTD-1: 88   Δ 1</a:t>
             </a:r>
           </a:p>
         </p:txBody>
@@ -12711,11 +12711,11 @@
             <a:r>
               <a:rPr sz="1200" b="1" i="0">
                 <a:solidFill>
-                  <a:srgbClr val="687386"/>
+                  <a:srgbClr val="D73527"/>
                 </a:solidFill>
                 <a:latin typeface="Arial"/>
               </a:rPr>
-              <a:t>N/A</a:t>
+              <a:t>-23,9%</a:t>
             </a:r>
           </a:p>
         </p:txBody>
@@ -12750,7 +12750,7 @@
                 </a:solidFill>
                 <a:latin typeface="Arial"/>
               </a:rPr>
-              <a:t>MTD-1: 0   Δ 3.831</a:t>
+              <a:t>MTD-1: 5.033   Δ -1.202</a:t>
             </a:r>
           </a:p>
         </p:txBody>
@@ -13886,7 +13886,7 @@
                           </a:solidFill>
                           <a:latin typeface="Arial"/>
                         </a:rPr>
-                        <a:t>0</a:t>
+                        <a:t>72</a:t>
                       </a:r>
                     </a:p>
                   </a:txBody>
@@ -13976,17 +13976,17 @@
                       <a:r>
                         <a:rPr sz="1050" b="0">
                           <a:solidFill>
-                            <a:srgbClr val="687386"/>
-                          </a:solidFill>
-                          <a:latin typeface="Arial"/>
-                        </a:rPr>
-                        <a:t>N/A</a:t>
-                      </a:r>
-                    </a:p>
-                  </a:txBody>
-                  <a:tcPr marL="27432" marR="27432" marT="0" marB="0">
-                    <a:solidFill>
-                      <a:srgbClr val="E9EDF2"/>
+                            <a:srgbClr val="137D3F"/>
+                          </a:solidFill>
+                          <a:latin typeface="Arial"/>
+                        </a:rPr>
+                        <a:t>+1,4%</a:t>
+                      </a:r>
+                    </a:p>
+                  </a:txBody>
+                  <a:tcPr marL="27432" marR="27432" marT="0" marB="0">
+                    <a:solidFill>
+                      <a:srgbClr val="E5F4EA"/>
                     </a:solidFill>
                     <a:lnL w="9000" cap="flat" cmpd="sng" algn="ctr">
                       <a:solidFill>
@@ -14027,7 +14027,7 @@
                           </a:solidFill>
                           <a:latin typeface="Arial"/>
                         </a:rPr>
-                        <a:t>0</a:t>
+                        <a:t>4.300</a:t>
                       </a:r>
                     </a:p>
                   </a:txBody>
@@ -14117,17 +14117,17 @@
                       <a:r>
                         <a:rPr sz="1050" b="0">
                           <a:solidFill>
-                            <a:srgbClr val="687386"/>
-                          </a:solidFill>
-                          <a:latin typeface="Arial"/>
-                        </a:rPr>
-                        <a:t>N/A</a:t>
-                      </a:r>
-                    </a:p>
-                  </a:txBody>
-                  <a:tcPr marL="27432" marR="27432" marT="0" marB="0">
-                    <a:solidFill>
-                      <a:srgbClr val="E9EDF2"/>
+                            <a:srgbClr val="D73527"/>
+                          </a:solidFill>
+                          <a:latin typeface="Arial"/>
+                        </a:rPr>
+                        <a:t>-25,0%</a:t>
+                      </a:r>
+                    </a:p>
+                  </a:txBody>
+                  <a:tcPr marL="27432" marR="27432" marT="0" marB="0">
+                    <a:solidFill>
+                      <a:srgbClr val="FBE9E7"/>
                     </a:solidFill>
                     <a:lnL w="9000" cap="flat" cmpd="sng" algn="ctr">
                       <a:solidFill>
@@ -14546,7 +14546,7 @@
                           </a:solidFill>
                           <a:latin typeface="Arial"/>
                         </a:rPr>
-                        <a:t>0</a:t>
+                        <a:t>16</a:t>
                       </a:r>
                     </a:p>
                   </a:txBody>
@@ -14640,7 +14640,7 @@
                           </a:solidFill>
                           <a:latin typeface="Arial"/>
                         </a:rPr>
-                        <a:t>N/A</a:t>
+                        <a:t>0,0%</a:t>
                       </a:r>
                     </a:p>
                   </a:txBody>
@@ -14687,7 +14687,7 @@
                           </a:solidFill>
                           <a:latin typeface="Arial"/>
                         </a:rPr>
-                        <a:t>0</a:t>
+                        <a:t>733</a:t>
                       </a:r>
                     </a:p>
                   </a:txBody>
@@ -14777,17 +14777,17 @@
                       <a:r>
                         <a:rPr sz="1050" b="0">
                           <a:solidFill>
-                            <a:srgbClr val="687386"/>
-                          </a:solidFill>
-                          <a:latin typeface="Arial"/>
-                        </a:rPr>
-                        <a:t>N/A</a:t>
-                      </a:r>
-                    </a:p>
-                  </a:txBody>
-                  <a:tcPr marL="27432" marR="27432" marT="0" marB="0">
-                    <a:solidFill>
-                      <a:srgbClr val="E9EDF2"/>
+                            <a:srgbClr val="D73527"/>
+                          </a:solidFill>
+                          <a:latin typeface="Arial"/>
+                        </a:rPr>
+                        <a:t>-17,1%</a:t>
+                      </a:r>
+                    </a:p>
+                  </a:txBody>
+                  <a:tcPr marL="27432" marR="27432" marT="0" marB="0">
+                    <a:solidFill>
+                      <a:srgbClr val="FBE9E7"/>
                     </a:solidFill>
                     <a:lnL w="9000" cap="flat" cmpd="sng" algn="ctr">
                       <a:solidFill>

--- a/reports/BRANCH_KUPANG_PERFORMANCE_SUMMARY_20260831_INARA.pptx
+++ b/reports/BRANCH_KUPANG_PERFORMANCE_SUMMARY_20260831_INARA.pptx
@@ -22873,7 +22873,7 @@
                 </a:solidFill>
                 <a:latin typeface="Arial"/>
               </a:rPr>
-              <a:t>ODP dikunjungi  97 (22,8%)</a:t>
+              <a:t>ODP dikunjungi  105 (24,7%)</a:t>
             </a:r>
           </a:p>
         </p:txBody>
@@ -22943,7 +22943,7 @@
                 </a:solidFill>
                 <a:latin typeface="Arial"/>
               </a:rPr>
-              <a:t>397</a:t>
+              <a:t>892</a:t>
             </a:r>
           </a:p>
         </p:txBody>
@@ -23095,7 +23095,7 @@
                 </a:solidFill>
                 <a:latin typeface="Arial"/>
               </a:rPr>
-              <a:t>ODP dikunjungi  116 (81,1%)</a:t>
+              <a:t>ODP dikunjungi  125 (87,4%)</a:t>
             </a:r>
           </a:p>
         </p:txBody>
@@ -23165,7 +23165,7 @@
                 </a:solidFill>
                 <a:latin typeface="Arial"/>
               </a:rPr>
-              <a:t>356</a:t>
+              <a:t>794</a:t>
             </a:r>
           </a:p>
         </p:txBody>
